--- a/maven_training/pdf/MSS_Training_Progression_PROTO.pptx
+++ b/maven_training/pdf/MSS_Training_Progression_PROTO.pptx
@@ -4426,7 +4426,7 @@
                   <a:srgbClr val="E2E8F0"/>
                 </a:solidFill>
               </a:rPr>
-              <a:t>17/25-series · S6/G6 · G2/G9</a:t>
+              <a:t>17/25-series · S6/G6 · G2</a:t>
             </a:r>
           </a:p>
         </p:txBody>
